--- a/apps/resources/bundled_files/6-klass-proporciya-procent-sabak.pptx
+++ b/apps/resources/bundled_files/6-klass-proporciya-procent-sabak.pptx
@@ -5196,7 +5196,7 @@
                 </a:solidFill>
                 <a:latin typeface="PT Sans"/>
               </a:rPr>
-              <a:t>6-класс · Математика</a:t>
+              <a:t/>
             </a:r>
           </a:p>
         </p:txBody>
@@ -5688,7 +5688,7 @@
                 </a:solidFill>
                 <a:latin typeface="PT Sans"/>
               </a:rPr>
-              <a:t>6-класс ›</a:t>
+              <a:t/>
             </a:r>
           </a:p>
           <a:p>
@@ -6637,7 +6637,7 @@
                 </a:solidFill>
                 <a:latin typeface="PT Sans"/>
               </a:rPr>
-              <a:t>6-класс ›</a:t>
+              <a:t/>
             </a:r>
           </a:p>
           <a:p>
@@ -12489,7 +12489,7 @@
                 </a:solidFill>
                 <a:latin typeface="PT Sans"/>
               </a:rPr>
-              <a:t>6-класс ›</a:t>
+              <a:t/>
             </a:r>
           </a:p>
           <a:p>
@@ -19035,7 +19035,7 @@
                 </a:solidFill>
                 <a:latin typeface="PT Sans"/>
               </a:rPr>
-              <a:t>6-класс ›</a:t>
+              <a:t/>
             </a:r>
           </a:p>
           <a:p>
@@ -20365,7 +20365,7 @@
                 </a:solidFill>
                 <a:latin typeface="PT Sans"/>
               </a:rPr>
-              <a:t>6-класс ›</a:t>
+              <a:t/>
             </a:r>
           </a:p>
           <a:p>
@@ -21077,7 +21077,7 @@
                 </a:solidFill>
                 <a:latin typeface="PT Sans"/>
               </a:rPr>
-              <a:t>6-класс ›</a:t>
+              <a:t/>
             </a:r>
           </a:p>
           <a:p>
@@ -21789,7 +21789,7 @@
                 </a:solidFill>
                 <a:latin typeface="PT Sans"/>
               </a:rPr>
-              <a:t>6-класс ›</a:t>
+              <a:t/>
             </a:r>
           </a:p>
           <a:p>
@@ -23338,7 +23338,7 @@
                 </a:solidFill>
                 <a:latin typeface="PT Sans"/>
               </a:rPr>
-              <a:t>6-класс ›</a:t>
+              <a:t/>
             </a:r>
           </a:p>
           <a:p>
@@ -24422,7 +24422,7 @@
                 </a:solidFill>
                 <a:latin typeface="PT Sans"/>
               </a:rPr>
-              <a:t>6-класс ›</a:t>
+              <a:t/>
             </a:r>
           </a:p>
           <a:p>
@@ -25952,7 +25952,7 @@
                 </a:solidFill>
                 <a:latin typeface="PT Sans"/>
               </a:rPr>
-              <a:t>6-класс ›</a:t>
+              <a:t/>
             </a:r>
           </a:p>
           <a:p>
@@ -28653,7 +28653,7 @@
                 </a:solidFill>
                 <a:latin typeface="PT Sans"/>
               </a:rPr>
-              <a:t>6-класс ›</a:t>
+              <a:t/>
             </a:r>
           </a:p>
           <a:p>
@@ -29930,7 +29930,7 @@
                 </a:solidFill>
                 <a:latin typeface="PT Sans"/>
               </a:rPr>
-              <a:t>6-класс ›</a:t>
+              <a:t/>
             </a:r>
           </a:p>
           <a:p>
@@ -31358,7 +31358,7 @@
                 </a:solidFill>
                 <a:latin typeface="PT Sans"/>
               </a:rPr>
-              <a:t>6-класс ›</a:t>
+              <a:t/>
             </a:r>
           </a:p>
           <a:p>
@@ -32814,7 +32814,7 @@
                 </a:solidFill>
                 <a:latin typeface="PT Sans"/>
               </a:rPr>
-              <a:t>6-класс ›</a:t>
+              <a:t/>
             </a:r>
           </a:p>
           <a:p>
@@ -33996,7 +33996,7 @@
                 </a:solidFill>
                 <a:latin typeface="PT Sans"/>
               </a:rPr>
-              <a:t>6-класс ›</a:t>
+              <a:t/>
             </a:r>
           </a:p>
           <a:p>
@@ -34796,7 +34796,7 @@
                 </a:solidFill>
                 <a:latin typeface="PT Sans"/>
               </a:rPr>
-              <a:t>6-класс ›</a:t>
+              <a:t/>
             </a:r>
           </a:p>
           <a:p>
@@ -35637,7 +35637,7 @@
                 </a:solidFill>
                 <a:latin typeface="PT Sans"/>
               </a:rPr>
-              <a:t>6-класс ›</a:t>
+              <a:t/>
             </a:r>
           </a:p>
           <a:p>
@@ -36586,7 +36586,7 @@
                 </a:solidFill>
                 <a:latin typeface="PT Sans"/>
               </a:rPr>
-              <a:t>6-класс ›</a:t>
+              <a:t/>
             </a:r>
           </a:p>
           <a:p>
@@ -38040,7 +38040,7 @@
                 </a:solidFill>
                 <a:latin typeface="PT Sans"/>
               </a:rPr>
-              <a:t>6-класс ›</a:t>
+              <a:t/>
             </a:r>
           </a:p>
           <a:p>
@@ -38786,7 +38786,7 @@
                 </a:solidFill>
                 <a:latin typeface="PT Sans"/>
               </a:rPr>
-              <a:t>6-класс ›</a:t>
+              <a:t/>
             </a:r>
           </a:p>
           <a:p>
@@ -39594,7 +39594,7 @@
                 </a:solidFill>
                 <a:latin typeface="PT Sans"/>
               </a:rPr>
-              <a:t>6-класс ›</a:t>
+              <a:t/>
             </a:r>
           </a:p>
           <a:p>
@@ -40785,7 +40785,7 @@
                 </a:solidFill>
                 <a:latin typeface="PT Sans"/>
               </a:rPr>
-              <a:t>6-класс ›</a:t>
+              <a:t/>
             </a:r>
           </a:p>
           <a:p>
@@ -41964,7 +41964,7 @@
                 </a:solidFill>
                 <a:latin typeface="PT Sans"/>
               </a:rPr>
-              <a:t>6-класс ›</a:t>
+              <a:t/>
             </a:r>
           </a:p>
           <a:p>
@@ -42145,7 +42145,7 @@
                 </a:solidFill>
                 <a:latin typeface="PT Sans"/>
               </a:rPr>
-              <a:t>4-класс</a:t>
+              <a:t/>
             </a:r>
           </a:p>
         </p:txBody>
@@ -42325,7 +42325,7 @@
                 </a:solidFill>
                 <a:latin typeface="PT Sans"/>
               </a:rPr>
-              <a:t>5-класс</a:t>
+              <a:t/>
             </a:r>
           </a:p>
         </p:txBody>
@@ -42505,7 +42505,7 @@
                 </a:solidFill>
                 <a:latin typeface="PT Sans"/>
               </a:rPr>
-              <a:t>6-класс</a:t>
+              <a:t/>
             </a:r>
           </a:p>
         </p:txBody>
@@ -42741,7 +42741,7 @@
                 </a:solidFill>
                 <a:latin typeface="PT Sans"/>
               </a:rPr>
-              <a:t>7-класс</a:t>
+              <a:t/>
             </a:r>
           </a:p>
         </p:txBody>
@@ -43161,7 +43161,7 @@
                 </a:solidFill>
                 <a:latin typeface="PT Sans"/>
               </a:rPr>
-              <a:t>6-класс ›</a:t>
+              <a:t/>
             </a:r>
           </a:p>
           <a:p>
@@ -44309,7 +44309,7 @@
                 </a:solidFill>
                 <a:latin typeface="PT Sans"/>
               </a:rPr>
-              <a:t>6-класс ›</a:t>
+              <a:t/>
             </a:r>
           </a:p>
           <a:p>

--- a/apps/resources/bundled_files/6-klass-proporciya-procent-sabak.pptx
+++ b/apps/resources/bundled_files/6-klass-proporciya-procent-sabak.pptx
@@ -1582,7 +1582,7 @@
           <a:lstStyle/>
           <a:p>
             <a:r>
-              <a:t>Ой жүгүртүү маданияты (Wenxi Lee, 2.6).</a:t>
+              <a:t>Ой жүгүртүү маданияты (Wenxi Lee, 2,6).</a:t>
             </a:r>
           </a:p>
         </p:txBody>
@@ -19853,7 +19853,7 @@
                 </a:solidFill>
                 <a:latin typeface="PT Sans"/>
               </a:rPr>
-              <a:t>p% = p/100: 100гө бөл, pга көбөйт</a:t>
+              <a:t>p% = p/100: 100гө бөл, рга көбөйт</a:t>
             </a:r>
           </a:p>
         </p:txBody>
